--- a/dist/초4/국어/읽기와요약/초4_국어_읽기와요약_03_중심내용간추리기.pptx
+++ b/dist/초4/국어/읽기와요약/초4_국어_읽기와요약_03_중심내용간추리기.pptx
@@ -120,13 +120,13 @@
   <p:extLst>
     <p:ext uri="{521415D9-36F7-43E2-AB2F-B90AF26B5E84}">
       <p14:sectionLst xmlns:p14="http://schemas.microsoft.com/office/powerpoint/2010/main">
-        <p14:section name="도입" id="{6a501f19-4944-a33b-8ce0-86047195726d}">
+        <p14:section name="도입" id="{6f8630d9-e872-7bec-7843-a5a2ff5bcdf0}">
           <p14:sldIdLst>
             <p14:sldId id="256"/>
             <p14:sldId id="257"/>
           </p14:sldIdLst>
         </p14:section>
-        <p14:section name="개념" id="{144a150d-bd2f-3a70-8548-5562214ad36d}">
+        <p14:section name="개념" id="{0099cb8f-2499-c3c5-a984-ec87a5d7297f}">
           <p14:sldIdLst>
             <p14:sldId id="258"/>
             <p14:sldId id="259"/>
@@ -135,25 +135,25 @@
             <p14:sldId id="262"/>
           </p14:sldIdLst>
         </p14:section>
-        <p14:section name="연습" id="{e21bf5ab-92bf-25c2-3d8b-48ba283165e3}">
+        <p14:section name="연습" id="{fd182898-4859-524f-7a3e-fbbe77293c51}">
           <p14:sldIdLst>
             <p14:sldId id="263"/>
             <p14:sldId id="264"/>
           </p14:sldIdLst>
         </p14:section>
-        <p14:section name="확인" id="{28645d82-ade0-bd11-687d-5a301addc444}">
+        <p14:section name="확인" id="{4f37b719-5ec4-33f6-1dc6-05b50b5ddf03}">
           <p14:sldIdLst>
             <p14:sldId id="265"/>
             <p14:sldId id="266"/>
             <p14:sldId id="267"/>
           </p14:sldIdLst>
         </p14:section>
-        <p14:section name="정리" id="{cbff335d-196c-b0eb-e6c8-c856777680bd}">
+        <p14:section name="정리" id="{baa1d878-8148-ec97-037c-873bbc0c0748}">
           <p14:sldIdLst>
             <p14:sldId id="268"/>
           </p14:sldIdLst>
         </p14:section>
-        <p14:section name="보충" id="{67a99ccf-e3a4-887b-f8f4-d5386acfc56d}">
+        <p14:section name="보충" id="{1064727e-d322-6c82-158d-931c9b8bbfa6}">
           <p14:sldIdLst>
             <p14:sldId id="269"/>
           </p14:sldIdLst>
@@ -7548,7 +7548,7 @@
           </p:nvPr>
         </p:nvGraphicFramePr>
         <p:xfrm>
-          <a:off x="1522476" y="1971548"/>
+          <a:off x="1522476" y="2004568"/>
           <a:ext cx="9144000" cy="914400"/>
         </p:xfrm>
         <a:graphic>
@@ -7559,7 +7559,7 @@
                 <a:gridCol w="1280160"/>
                 <a:gridCol w="7863840"/>
               </a:tblGrid>
-              <a:tr h="528320">
+              <a:tr h="511810">
                 <a:tc>
                   <a:txBody>
                     <a:bodyPr/>
@@ -7697,7 +7697,7 @@
                   </a:tcPr>
                 </a:tc>
               </a:tr>
-              <a:tr h="528320">
+              <a:tr h="511810">
                 <a:tc>
                   <a:txBody>
                     <a:bodyPr/>
@@ -7835,7 +7835,7 @@
                   </a:tcPr>
                 </a:tc>
               </a:tr>
-              <a:tr h="528320">
+              <a:tr h="511810">
                 <a:tc>
                   <a:txBody>
                     <a:bodyPr/>
@@ -7973,7 +7973,7 @@
                   </a:tcPr>
                 </a:tc>
               </a:tr>
-              <a:tr h="528320">
+              <a:tr h="511810">
                 <a:tc>
                   <a:txBody>
                     <a:bodyPr/>
